--- a/docs/Inside-RetroCastX.pptx
+++ b/docs/Inside-RetroCastX.pptx
@@ -199,7 +199,7 @@
           <a:p>
             <a:fld id="{0611A3A9-DE0C-B54E-B28C-6546C0BB25CE}" type="datetimeFigureOut">
               <a:rPr kumimoji="1" lang="ja-JP" altLang="en-US" smtClean="0"/>
-              <a:t>2026/8/7</a:t>
+              <a:t>2026/8/9</a:t>
             </a:fld>
             <a:endParaRPr kumimoji="1" lang="ja-JP" altLang="en-US"/>
           </a:p>
@@ -645,7 +645,7 @@
           <a:p>
             <a:fld id="{3EBCEBF8-DC12-4A41-BC42-8B1EDD45961F}" type="datetime1">
               <a:rPr kumimoji="1" lang="ja-JP" altLang="en-US" smtClean="0"/>
-              <a:t>2026/8/7</a:t>
+              <a:t>2026/8/9</a:t>
             </a:fld>
             <a:endParaRPr kumimoji="1" lang="ja-JP" altLang="en-US"/>
           </a:p>
@@ -879,7 +879,7 @@
           <a:p>
             <a:fld id="{39ECFA6A-3358-EF46-A120-F8F560EA8934}" type="datetime1">
               <a:rPr kumimoji="1" lang="ja-JP" altLang="en-US" smtClean="0"/>
-              <a:t>2026/8/7</a:t>
+              <a:t>2026/8/9</a:t>
             </a:fld>
             <a:endParaRPr kumimoji="1" lang="ja-JP" altLang="en-US"/>
           </a:p>
@@ -1123,7 +1123,7 @@
           <a:p>
             <a:fld id="{27D45CA2-E91C-6D44-A1B3-C66957864EEE}" type="datetime1">
               <a:rPr kumimoji="1" lang="ja-JP" altLang="en-US" smtClean="0"/>
-              <a:t>2026/8/7</a:t>
+              <a:t>2026/8/9</a:t>
             </a:fld>
             <a:endParaRPr kumimoji="1" lang="ja-JP" altLang="en-US"/>
           </a:p>
@@ -1357,7 +1357,7 @@
           <a:p>
             <a:fld id="{BEE6B9C4-73C3-3348-96F9-7E27AE0CAA35}" type="datetime1">
               <a:rPr kumimoji="1" lang="ja-JP" altLang="en-US" smtClean="0"/>
-              <a:t>2026/8/7</a:t>
+              <a:t>2026/8/9</a:t>
             </a:fld>
             <a:endParaRPr kumimoji="1" lang="ja-JP" altLang="en-US"/>
           </a:p>
@@ -1636,7 +1636,7 @@
           <a:p>
             <a:fld id="{582928D2-3A9E-1840-8265-6ACB352173F2}" type="datetime1">
               <a:rPr kumimoji="1" lang="ja-JP" altLang="en-US" smtClean="0"/>
-              <a:t>2026/8/7</a:t>
+              <a:t>2026/8/9</a:t>
             </a:fld>
             <a:endParaRPr kumimoji="1" lang="ja-JP" altLang="en-US"/>
           </a:p>
@@ -1969,7 +1969,7 @@
           <a:p>
             <a:fld id="{877A7542-7F94-0B47-9902-FD0E5C4048F9}" type="datetime1">
               <a:rPr kumimoji="1" lang="ja-JP" altLang="en-US" smtClean="0"/>
-              <a:t>2026/8/7</a:t>
+              <a:t>2026/8/9</a:t>
             </a:fld>
             <a:endParaRPr kumimoji="1" lang="ja-JP" altLang="en-US"/>
           </a:p>
@@ -2449,7 +2449,7 @@
           <a:p>
             <a:fld id="{97D6AEAD-6313-9341-8AE9-BDF2811566C2}" type="datetime1">
               <a:rPr kumimoji="1" lang="ja-JP" altLang="en-US" smtClean="0"/>
-              <a:t>2026/8/7</a:t>
+              <a:t>2026/8/9</a:t>
             </a:fld>
             <a:endParaRPr kumimoji="1" lang="ja-JP" altLang="en-US"/>
           </a:p>
@@ -2594,7 +2594,7 @@
           <a:p>
             <a:fld id="{549A3F53-62DE-0A4D-B1B3-E9160981BB2E}" type="datetime1">
               <a:rPr kumimoji="1" lang="ja-JP" altLang="en-US" smtClean="0"/>
-              <a:t>2026/8/7</a:t>
+              <a:t>2026/8/9</a:t>
             </a:fld>
             <a:endParaRPr kumimoji="1" lang="ja-JP" altLang="en-US"/>
           </a:p>
@@ -2711,7 +2711,7 @@
           <a:p>
             <a:fld id="{84702CFB-2461-C24B-8477-FC7B41587221}" type="datetime1">
               <a:rPr kumimoji="1" lang="ja-JP" altLang="en-US" smtClean="0"/>
-              <a:t>2026/8/7</a:t>
+              <a:t>2026/8/9</a:t>
             </a:fld>
             <a:endParaRPr kumimoji="1" lang="ja-JP" altLang="en-US"/>
           </a:p>
@@ -3058,7 +3058,7 @@
           <a:p>
             <a:fld id="{F0C4A98F-0142-AE4A-B78F-DF7D9A439098}" type="datetime1">
               <a:rPr kumimoji="1" lang="ja-JP" altLang="en-US" smtClean="0"/>
-              <a:t>2026/8/7</a:t>
+              <a:t>2026/8/9</a:t>
             </a:fld>
             <a:endParaRPr kumimoji="1" lang="ja-JP" altLang="en-US"/>
           </a:p>
@@ -3350,7 +3350,7 @@
           <a:p>
             <a:fld id="{6F4ED2A2-CA9D-E04D-8808-299DB345BAE9}" type="datetime1">
               <a:rPr kumimoji="1" lang="ja-JP" altLang="en-US" smtClean="0"/>
-              <a:t>2026/8/7</a:t>
+              <a:t>2026/8/9</a:t>
             </a:fld>
             <a:endParaRPr kumimoji="1" lang="ja-JP" altLang="en-US"/>
           </a:p>
@@ -3627,7 +3627,7 @@
           <a:p>
             <a:fld id="{4F48EC6A-A133-C84F-B5EE-7E2745BABCEB}" type="datetime1">
               <a:rPr kumimoji="1" lang="ja-JP" altLang="en-US" smtClean="0"/>
-              <a:t>2026/8/7</a:t>
+              <a:t>2026/8/9</a:t>
             </a:fld>
             <a:endParaRPr kumimoji="1" lang="ja-JP" altLang="en-US"/>
           </a:p>
@@ -17052,7 +17052,7 @@
         </p:nvSpPr>
         <p:spPr>
           <a:xfrm>
-            <a:off x="4572000" y="2799007"/>
+            <a:off x="4572000" y="3658951"/>
             <a:ext cx="396887" cy="1396496"/>
           </a:xfrm>
           <a:prstGeom prst="rect">
@@ -17416,7 +17416,7 @@
         </p:nvSpPr>
         <p:spPr>
           <a:xfrm>
-            <a:off x="4414418" y="2799007"/>
+            <a:off x="4414418" y="3658951"/>
             <a:ext cx="396887" cy="1396496"/>
           </a:xfrm>
           <a:prstGeom prst="rect">
@@ -17779,7 +17779,7 @@
         </p:nvGrpSpPr>
         <p:grpSpPr>
           <a:xfrm>
-            <a:off x="4201578" y="2794195"/>
+            <a:off x="4201578" y="3654139"/>
             <a:ext cx="344916" cy="1396496"/>
             <a:chOff x="5407550" y="3284884"/>
             <a:chExt cx="344916" cy="1396496"/>
@@ -18591,7 +18591,7 @@
         </p:nvSpPr>
         <p:spPr>
           <a:xfrm>
-            <a:off x="4414418" y="1488318"/>
+            <a:off x="4414418" y="2348262"/>
             <a:ext cx="396887" cy="1396496"/>
           </a:xfrm>
           <a:prstGeom prst="rect">
@@ -18954,7 +18954,7 @@
         </p:nvGrpSpPr>
         <p:grpSpPr>
           <a:xfrm>
-            <a:off x="4201578" y="1483506"/>
+            <a:off x="4201578" y="2343450"/>
             <a:ext cx="344916" cy="1396496"/>
             <a:chOff x="5407550" y="3284884"/>
             <a:chExt cx="344916" cy="1396496"/>
@@ -19766,7 +19766,7 @@
         </p:nvSpPr>
         <p:spPr>
           <a:xfrm>
-            <a:off x="4572000" y="1488318"/>
+            <a:off x="4572000" y="2348262"/>
             <a:ext cx="396887" cy="1396496"/>
           </a:xfrm>
           <a:prstGeom prst="rect">
@@ -21486,6 +21486,1616 @@
           </p:txBody>
         </p:sp>
       </p:grpSp>
+      <p:sp>
+        <p:nvSpPr>
+          <p:cNvPr id="2" name="Google Shape;3961;p51">
+            <a:extLst>
+              <a:ext uri="{FF2B5EF4-FFF2-40B4-BE49-F238E27FC236}">
+                <a16:creationId xmlns:a16="http://schemas.microsoft.com/office/drawing/2014/main" id="{A9BF524B-0991-411E-28BB-CFBC013051E9}"/>
+              </a:ext>
+            </a:extLst>
+          </p:cNvPr>
+          <p:cNvSpPr txBox="1"/>
+          <p:nvPr/>
+        </p:nvSpPr>
+        <p:spPr>
+          <a:xfrm>
+            <a:off x="4572000" y="1037573"/>
+            <a:ext cx="396887" cy="1396496"/>
+          </a:xfrm>
+          <a:prstGeom prst="rect">
+            <a:avLst/>
+          </a:prstGeom>
+          <a:noFill/>
+          <a:ln>
+            <a:noFill/>
+          </a:ln>
+        </p:spPr>
+        <p:txBody>
+          <a:bodyPr spcFirstLastPara="1" wrap="square" lIns="91425" tIns="45700" rIns="91425" bIns="45700" anchor="t" anchorCtr="0">
+            <a:spAutoFit/>
+          </a:bodyPr>
+          <a:lstStyle/>
+          <a:p>
+            <a:pPr marL="0" marR="0" lvl="0" indent="0" rtl="0">
+              <a:spcBef>
+                <a:spcPts val="0"/>
+              </a:spcBef>
+              <a:spcAft>
+                <a:spcPts val="0"/>
+              </a:spcAft>
+              <a:buNone/>
+            </a:pPr>
+            <a:r>
+              <a:rPr lang="en-US" sz="565" dirty="0">
+                <a:solidFill>
+                  <a:schemeClr val="dk1"/>
+                </a:solidFill>
+                <a:latin typeface="HeadLineA"/>
+                <a:ea typeface="HeadLineA"/>
+                <a:cs typeface="HeadLineA"/>
+                <a:sym typeface="HeadLineA"/>
+              </a:rPr>
+              <a:t>-</a:t>
+            </a:r>
+          </a:p>
+          <a:p>
+            <a:pPr marL="0" marR="0" lvl="0" indent="0" rtl="0">
+              <a:spcBef>
+                <a:spcPts val="0"/>
+              </a:spcBef>
+              <a:spcAft>
+                <a:spcPts val="0"/>
+              </a:spcAft>
+              <a:buNone/>
+            </a:pPr>
+            <a:r>
+              <a:rPr lang="en-US" sz="565" dirty="0">
+                <a:solidFill>
+                  <a:schemeClr val="dk1"/>
+                </a:solidFill>
+                <a:latin typeface="HeadLineA"/>
+                <a:ea typeface="HeadLineA"/>
+                <a:cs typeface="HeadLineA"/>
+                <a:sym typeface="HeadLineA"/>
+              </a:rPr>
+              <a:t>B2</a:t>
+            </a:r>
+          </a:p>
+          <a:p>
+            <a:pPr marL="0" marR="0" lvl="0" indent="0" rtl="0">
+              <a:spcBef>
+                <a:spcPts val="0"/>
+              </a:spcBef>
+              <a:spcAft>
+                <a:spcPts val="0"/>
+              </a:spcAft>
+              <a:buNone/>
+            </a:pPr>
+            <a:r>
+              <a:rPr lang="en-US" sz="565" dirty="0">
+                <a:solidFill>
+                  <a:schemeClr val="dk1"/>
+                </a:solidFill>
+                <a:latin typeface="HeadLineA"/>
+                <a:ea typeface="HeadLineA"/>
+                <a:cs typeface="HeadLineA"/>
+                <a:sym typeface="HeadLineA"/>
+              </a:rPr>
+              <a:t>K4</a:t>
+            </a:r>
+          </a:p>
+          <a:p>
+            <a:pPr marL="0" marR="0" lvl="0" indent="0" rtl="0">
+              <a:spcBef>
+                <a:spcPts val="0"/>
+              </a:spcBef>
+              <a:spcAft>
+                <a:spcPts val="0"/>
+              </a:spcAft>
+              <a:buNone/>
+            </a:pPr>
+            <a:r>
+              <a:rPr lang="en-US" sz="565" dirty="0">
+                <a:solidFill>
+                  <a:schemeClr val="dk1"/>
+                </a:solidFill>
+                <a:latin typeface="HeadLineA"/>
+                <a:ea typeface="HeadLineA"/>
+                <a:cs typeface="HeadLineA"/>
+                <a:sym typeface="HeadLineA"/>
+              </a:rPr>
+              <a:t>A2</a:t>
+            </a:r>
+            <a:endParaRPr lang="en-US" sz="565" dirty="0">
+              <a:solidFill>
+                <a:schemeClr val="dk1"/>
+              </a:solidFill>
+              <a:latin typeface="HeadLineA"/>
+              <a:ea typeface="HeadLineA"/>
+              <a:sym typeface="HeadLineA"/>
+            </a:endParaRPr>
+          </a:p>
+          <a:p>
+            <a:pPr marL="0" marR="0" lvl="0" indent="0" rtl="0">
+              <a:spcBef>
+                <a:spcPts val="0"/>
+              </a:spcBef>
+              <a:spcAft>
+                <a:spcPts val="0"/>
+              </a:spcAft>
+              <a:buNone/>
+            </a:pPr>
+            <a:r>
+              <a:rPr lang="en-US" sz="565" dirty="0">
+                <a:solidFill>
+                  <a:schemeClr val="dk1"/>
+                </a:solidFill>
+                <a:latin typeface="HeadLineA"/>
+                <a:ea typeface="HeadLineA"/>
+                <a:sym typeface="HeadLineA"/>
+              </a:rPr>
+              <a:t>GND</a:t>
+            </a:r>
+          </a:p>
+          <a:p>
+            <a:pPr marL="0" marR="0" lvl="0" indent="0" rtl="0">
+              <a:spcBef>
+                <a:spcPts val="0"/>
+              </a:spcBef>
+              <a:spcAft>
+                <a:spcPts val="0"/>
+              </a:spcAft>
+              <a:buNone/>
+            </a:pPr>
+            <a:r>
+              <a:rPr lang="en-US" sz="565" dirty="0">
+                <a:solidFill>
+                  <a:schemeClr val="dk1"/>
+                </a:solidFill>
+                <a:latin typeface="HeadLineA"/>
+                <a:ea typeface="HeadLineA"/>
+                <a:sym typeface="HeadLineA"/>
+              </a:rPr>
+              <a:t>3V3</a:t>
+            </a:r>
+          </a:p>
+          <a:p>
+            <a:pPr marL="0" marR="0" lvl="0" indent="0" rtl="0">
+              <a:spcBef>
+                <a:spcPts val="0"/>
+              </a:spcBef>
+              <a:spcAft>
+                <a:spcPts val="0"/>
+              </a:spcAft>
+              <a:buNone/>
+            </a:pPr>
+            <a:r>
+              <a:rPr lang="en-US" sz="565" dirty="0">
+                <a:solidFill>
+                  <a:schemeClr val="dk1"/>
+                </a:solidFill>
+                <a:latin typeface="HeadLineA"/>
+                <a:ea typeface="HeadLineA"/>
+                <a:sym typeface="HeadLineA"/>
+              </a:rPr>
+              <a:t>J5</a:t>
+            </a:r>
+          </a:p>
+          <a:p>
+            <a:pPr marL="0" marR="0" lvl="0" indent="0" rtl="0">
+              <a:spcBef>
+                <a:spcPts val="0"/>
+              </a:spcBef>
+              <a:spcAft>
+                <a:spcPts val="0"/>
+              </a:spcAft>
+              <a:buNone/>
+            </a:pPr>
+            <a:r>
+              <a:rPr lang="en-US" sz="565" dirty="0">
+                <a:solidFill>
+                  <a:schemeClr val="dk1"/>
+                </a:solidFill>
+                <a:latin typeface="HeadLineA"/>
+                <a:ea typeface="HeadLineA"/>
+                <a:sym typeface="HeadLineA"/>
+              </a:rPr>
+              <a:t>GND</a:t>
+            </a:r>
+          </a:p>
+          <a:p>
+            <a:pPr marL="0" marR="0" lvl="0" indent="0" rtl="0">
+              <a:spcBef>
+                <a:spcPts val="0"/>
+              </a:spcBef>
+              <a:spcAft>
+                <a:spcPts val="0"/>
+              </a:spcAft>
+              <a:buNone/>
+            </a:pPr>
+            <a:r>
+              <a:rPr lang="en-US" sz="565" dirty="0">
+                <a:solidFill>
+                  <a:schemeClr val="dk1"/>
+                </a:solidFill>
+                <a:latin typeface="HeadLineA"/>
+                <a:ea typeface="HeadLineA"/>
+                <a:sym typeface="HeadLineA"/>
+              </a:rPr>
+              <a:t>H5</a:t>
+            </a:r>
+          </a:p>
+          <a:p>
+            <a:pPr marL="0" marR="0" lvl="0" indent="0" rtl="0">
+              <a:spcBef>
+                <a:spcPts val="0"/>
+              </a:spcBef>
+              <a:spcAft>
+                <a:spcPts val="0"/>
+              </a:spcAft>
+              <a:buNone/>
+            </a:pPr>
+            <a:r>
+              <a:rPr lang="en-US" sz="565" dirty="0">
+                <a:solidFill>
+                  <a:schemeClr val="dk1"/>
+                </a:solidFill>
+                <a:latin typeface="HeadLineA"/>
+                <a:ea typeface="HeadLineA"/>
+                <a:sym typeface="HeadLineA"/>
+              </a:rPr>
+              <a:t>H3</a:t>
+            </a:r>
+          </a:p>
+          <a:p>
+            <a:pPr marL="0" marR="0" lvl="0" indent="0" rtl="0">
+              <a:spcBef>
+                <a:spcPts val="0"/>
+              </a:spcBef>
+              <a:spcAft>
+                <a:spcPts val="0"/>
+              </a:spcAft>
+              <a:buNone/>
+            </a:pPr>
+            <a:r>
+              <a:rPr lang="en-US" sz="565" dirty="0">
+                <a:solidFill>
+                  <a:schemeClr val="dk1"/>
+                </a:solidFill>
+                <a:latin typeface="HeadLineA"/>
+                <a:ea typeface="HeadLineA"/>
+                <a:sym typeface="HeadLineA"/>
+              </a:rPr>
+              <a:t>F3</a:t>
+            </a:r>
+          </a:p>
+          <a:p>
+            <a:pPr marL="0" marR="0" lvl="0" indent="0" rtl="0">
+              <a:spcBef>
+                <a:spcPts val="0"/>
+              </a:spcBef>
+              <a:spcAft>
+                <a:spcPts val="0"/>
+              </a:spcAft>
+              <a:buNone/>
+            </a:pPr>
+            <a:r>
+              <a:rPr lang="en-US" sz="565" dirty="0">
+                <a:solidFill>
+                  <a:schemeClr val="dk1"/>
+                </a:solidFill>
+                <a:latin typeface="HeadLineA"/>
+                <a:ea typeface="HeadLineA"/>
+                <a:sym typeface="HeadLineA"/>
+              </a:rPr>
+              <a:t>E4</a:t>
+            </a:r>
+          </a:p>
+          <a:p>
+            <a:pPr marL="0" marR="0" lvl="0" indent="0" rtl="0">
+              <a:spcBef>
+                <a:spcPts val="0"/>
+              </a:spcBef>
+              <a:spcAft>
+                <a:spcPts val="0"/>
+              </a:spcAft>
+              <a:buNone/>
+            </a:pPr>
+            <a:r>
+              <a:rPr lang="en-US" sz="565" dirty="0">
+                <a:solidFill>
+                  <a:schemeClr val="dk1"/>
+                </a:solidFill>
+                <a:latin typeface="HeadLineA"/>
+                <a:ea typeface="HeadLineA"/>
+                <a:sym typeface="HeadLineA"/>
+              </a:rPr>
+              <a:t>E1</a:t>
+            </a:r>
+          </a:p>
+          <a:p>
+            <a:pPr marL="0" marR="0" lvl="0" indent="0" rtl="0">
+              <a:spcBef>
+                <a:spcPts val="0"/>
+              </a:spcBef>
+              <a:spcAft>
+                <a:spcPts val="0"/>
+              </a:spcAft>
+              <a:buNone/>
+            </a:pPr>
+            <a:r>
+              <a:rPr lang="en-US" sz="565" dirty="0">
+                <a:solidFill>
+                  <a:schemeClr val="dk1"/>
+                </a:solidFill>
+                <a:latin typeface="HeadLineA"/>
+                <a:ea typeface="HeadLineA"/>
+                <a:sym typeface="HeadLineA"/>
+              </a:rPr>
+              <a:t>GND</a:t>
+            </a:r>
+          </a:p>
+          <a:p>
+            <a:pPr marL="0" marR="0" lvl="0" indent="0" rtl="0">
+              <a:spcBef>
+                <a:spcPts val="0"/>
+              </a:spcBef>
+              <a:spcAft>
+                <a:spcPts val="0"/>
+              </a:spcAft>
+              <a:buNone/>
+            </a:pPr>
+            <a:r>
+              <a:rPr lang="en-US" sz="565" dirty="0">
+                <a:solidFill>
+                  <a:schemeClr val="dk1"/>
+                </a:solidFill>
+                <a:latin typeface="HeadLineA"/>
+                <a:ea typeface="HeadLineA"/>
+                <a:sym typeface="HeadLineA"/>
+              </a:rPr>
+              <a:t>3V3</a:t>
+            </a:r>
+            <a:endParaRPr dirty="0"/>
+          </a:p>
+        </p:txBody>
+      </p:sp>
+      <p:sp>
+        <p:nvSpPr>
+          <p:cNvPr id="10" name="Google Shape;3962;p51">
+            <a:extLst>
+              <a:ext uri="{FF2B5EF4-FFF2-40B4-BE49-F238E27FC236}">
+                <a16:creationId xmlns:a16="http://schemas.microsoft.com/office/drawing/2014/main" id="{0C9B6B34-0230-369C-451C-5446C005E53A}"/>
+              </a:ext>
+            </a:extLst>
+          </p:cNvPr>
+          <p:cNvSpPr txBox="1"/>
+          <p:nvPr/>
+        </p:nvSpPr>
+        <p:spPr>
+          <a:xfrm>
+            <a:off x="4414418" y="1037573"/>
+            <a:ext cx="396887" cy="1396496"/>
+          </a:xfrm>
+          <a:prstGeom prst="rect">
+            <a:avLst/>
+          </a:prstGeom>
+          <a:noFill/>
+          <a:ln>
+            <a:noFill/>
+          </a:ln>
+        </p:spPr>
+        <p:txBody>
+          <a:bodyPr spcFirstLastPara="1" wrap="square" lIns="91425" tIns="45700" rIns="91425" bIns="45700" anchor="t" anchorCtr="0">
+            <a:spAutoFit/>
+          </a:bodyPr>
+          <a:lstStyle/>
+          <a:p>
+            <a:pPr marL="0" marR="0" lvl="0" indent="0" rtl="0">
+              <a:spcBef>
+                <a:spcPts val="0"/>
+              </a:spcBef>
+              <a:spcAft>
+                <a:spcPts val="0"/>
+              </a:spcAft>
+              <a:buNone/>
+            </a:pPr>
+            <a:r>
+              <a:rPr lang="en-US" sz="565" dirty="0">
+                <a:solidFill>
+                  <a:schemeClr val="dk1"/>
+                </a:solidFill>
+                <a:latin typeface="HeadLineA"/>
+                <a:ea typeface="HeadLineA"/>
+                <a:sym typeface="HeadLineA"/>
+              </a:rPr>
+              <a:t>-</a:t>
+            </a:r>
+          </a:p>
+          <a:p>
+            <a:pPr marL="0" marR="0" lvl="0" indent="0" rtl="0">
+              <a:spcBef>
+                <a:spcPts val="0"/>
+              </a:spcBef>
+              <a:spcAft>
+                <a:spcPts val="0"/>
+              </a:spcAft>
+              <a:buNone/>
+            </a:pPr>
+            <a:r>
+              <a:rPr lang="en-US" sz="565" dirty="0">
+                <a:solidFill>
+                  <a:schemeClr val="dk1"/>
+                </a:solidFill>
+                <a:latin typeface="HeadLineA"/>
+                <a:ea typeface="HeadLineA"/>
+                <a:sym typeface="HeadLineA"/>
+              </a:rPr>
+              <a:t>E19</a:t>
+            </a:r>
+          </a:p>
+          <a:p>
+            <a:pPr marL="0" marR="0" lvl="0" indent="0" rtl="0">
+              <a:spcBef>
+                <a:spcPts val="0"/>
+              </a:spcBef>
+              <a:spcAft>
+                <a:spcPts val="0"/>
+              </a:spcAft>
+              <a:buNone/>
+            </a:pPr>
+            <a:r>
+              <a:rPr lang="en-US" sz="565" dirty="0">
+                <a:solidFill>
+                  <a:schemeClr val="dk1"/>
+                </a:solidFill>
+                <a:latin typeface="HeadLineA"/>
+                <a:ea typeface="HeadLineA"/>
+                <a:sym typeface="HeadLineA"/>
+              </a:rPr>
+              <a:t>B3</a:t>
+            </a:r>
+          </a:p>
+          <a:p>
+            <a:pPr marL="0" marR="0" lvl="0" indent="0" rtl="0">
+              <a:spcBef>
+                <a:spcPts val="0"/>
+              </a:spcBef>
+              <a:spcAft>
+                <a:spcPts val="0"/>
+              </a:spcAft>
+              <a:buNone/>
+            </a:pPr>
+            <a:r>
+              <a:rPr lang="en-US" sz="565" dirty="0">
+                <a:solidFill>
+                  <a:schemeClr val="dk1"/>
+                </a:solidFill>
+                <a:latin typeface="HeadLineA"/>
+                <a:ea typeface="HeadLineA"/>
+                <a:sym typeface="HeadLineA"/>
+              </a:rPr>
+              <a:t>K5</a:t>
+            </a:r>
+          </a:p>
+          <a:p>
+            <a:pPr marL="0" marR="0" lvl="0" indent="0" rtl="0">
+              <a:spcBef>
+                <a:spcPts val="0"/>
+              </a:spcBef>
+              <a:spcAft>
+                <a:spcPts val="0"/>
+              </a:spcAft>
+              <a:buNone/>
+            </a:pPr>
+            <a:r>
+              <a:rPr lang="en-US" sz="565" dirty="0">
+                <a:solidFill>
+                  <a:schemeClr val="dk1"/>
+                </a:solidFill>
+                <a:latin typeface="HeadLineA"/>
+                <a:ea typeface="HeadLineA"/>
+                <a:sym typeface="HeadLineA"/>
+              </a:rPr>
+              <a:t>GND</a:t>
+            </a:r>
+          </a:p>
+          <a:p>
+            <a:pPr marL="0" marR="0" lvl="0" indent="0" rtl="0">
+              <a:spcBef>
+                <a:spcPts val="0"/>
+              </a:spcBef>
+              <a:spcAft>
+                <a:spcPts val="0"/>
+              </a:spcAft>
+              <a:buNone/>
+            </a:pPr>
+            <a:r>
+              <a:rPr lang="en-US" sz="565" dirty="0">
+                <a:solidFill>
+                  <a:schemeClr val="dk1"/>
+                </a:solidFill>
+                <a:latin typeface="HeadLineA"/>
+                <a:ea typeface="HeadLineA"/>
+                <a:sym typeface="HeadLineA"/>
+              </a:rPr>
+              <a:t>3V3</a:t>
+            </a:r>
+          </a:p>
+          <a:p>
+            <a:pPr marL="0" marR="0" lvl="0" indent="0" rtl="0">
+              <a:spcBef>
+                <a:spcPts val="0"/>
+              </a:spcBef>
+              <a:spcAft>
+                <a:spcPts val="0"/>
+              </a:spcAft>
+              <a:buNone/>
+            </a:pPr>
+            <a:r>
+              <a:rPr lang="en-US" sz="565" dirty="0">
+                <a:solidFill>
+                  <a:schemeClr val="dk1"/>
+                </a:solidFill>
+                <a:latin typeface="HeadLineA"/>
+                <a:ea typeface="HeadLineA"/>
+                <a:sym typeface="HeadLineA"/>
+              </a:rPr>
+              <a:t>K3</a:t>
+            </a:r>
+          </a:p>
+          <a:p>
+            <a:pPr marL="0" marR="0" lvl="0" indent="0" rtl="0">
+              <a:spcBef>
+                <a:spcPts val="0"/>
+              </a:spcBef>
+              <a:spcAft>
+                <a:spcPts val="0"/>
+              </a:spcAft>
+              <a:buNone/>
+            </a:pPr>
+            <a:r>
+              <a:rPr lang="en-US" sz="565" dirty="0">
+                <a:solidFill>
+                  <a:schemeClr val="dk1"/>
+                </a:solidFill>
+                <a:latin typeface="HeadLineA"/>
+                <a:ea typeface="HeadLineA"/>
+                <a:sym typeface="HeadLineA"/>
+              </a:rPr>
+              <a:t>5V</a:t>
+            </a:r>
+          </a:p>
+          <a:p>
+            <a:pPr marL="0" marR="0" lvl="0" indent="0" rtl="0">
+              <a:spcBef>
+                <a:spcPts val="0"/>
+              </a:spcBef>
+              <a:spcAft>
+                <a:spcPts val="0"/>
+              </a:spcAft>
+              <a:buNone/>
+            </a:pPr>
+            <a:r>
+              <a:rPr lang="en-US" sz="565" dirty="0">
+                <a:solidFill>
+                  <a:schemeClr val="dk1"/>
+                </a:solidFill>
+                <a:latin typeface="HeadLineA"/>
+                <a:ea typeface="HeadLineA"/>
+                <a:sym typeface="HeadLineA"/>
+              </a:rPr>
+              <a:t>J4</a:t>
+            </a:r>
+          </a:p>
+          <a:p>
+            <a:pPr marL="0" marR="0" lvl="0" indent="0" rtl="0">
+              <a:spcBef>
+                <a:spcPts val="0"/>
+              </a:spcBef>
+              <a:spcAft>
+                <a:spcPts val="0"/>
+              </a:spcAft>
+              <a:buNone/>
+            </a:pPr>
+            <a:r>
+              <a:rPr lang="en-US" sz="565" dirty="0">
+                <a:solidFill>
+                  <a:schemeClr val="dk1"/>
+                </a:solidFill>
+                <a:latin typeface="HeadLineA"/>
+                <a:ea typeface="HeadLineA"/>
+                <a:sym typeface="HeadLineA"/>
+              </a:rPr>
+              <a:t>H4</a:t>
+            </a:r>
+          </a:p>
+          <a:p>
+            <a:pPr marL="0" marR="0" lvl="0" indent="0" rtl="0">
+              <a:spcBef>
+                <a:spcPts val="0"/>
+              </a:spcBef>
+              <a:spcAft>
+                <a:spcPts val="0"/>
+              </a:spcAft>
+              <a:buNone/>
+            </a:pPr>
+            <a:r>
+              <a:rPr lang="en-US" sz="565" dirty="0">
+                <a:solidFill>
+                  <a:schemeClr val="dk1"/>
+                </a:solidFill>
+                <a:latin typeface="HeadLineA"/>
+                <a:ea typeface="HeadLineA"/>
+                <a:sym typeface="HeadLineA"/>
+              </a:rPr>
+              <a:t>G3</a:t>
+            </a:r>
+          </a:p>
+          <a:p>
+            <a:pPr marL="0" marR="0" lvl="0" indent="0" rtl="0">
+              <a:spcBef>
+                <a:spcPts val="0"/>
+              </a:spcBef>
+              <a:spcAft>
+                <a:spcPts val="0"/>
+              </a:spcAft>
+              <a:buNone/>
+            </a:pPr>
+            <a:r>
+              <a:rPr lang="en-US" sz="565" dirty="0">
+                <a:solidFill>
+                  <a:schemeClr val="dk1"/>
+                </a:solidFill>
+                <a:latin typeface="HeadLineA"/>
+                <a:ea typeface="HeadLineA"/>
+                <a:sym typeface="HeadLineA"/>
+              </a:rPr>
+              <a:t>F1</a:t>
+            </a:r>
+          </a:p>
+          <a:p>
+            <a:pPr marL="0" marR="0" lvl="0" indent="0" rtl="0">
+              <a:spcBef>
+                <a:spcPts val="0"/>
+              </a:spcBef>
+              <a:spcAft>
+                <a:spcPts val="0"/>
+              </a:spcAft>
+              <a:buNone/>
+            </a:pPr>
+            <a:r>
+              <a:rPr lang="en-US" sz="565" dirty="0">
+                <a:solidFill>
+                  <a:schemeClr val="dk1"/>
+                </a:solidFill>
+                <a:latin typeface="HeadLineA"/>
+                <a:ea typeface="HeadLineA"/>
+                <a:sym typeface="HeadLineA"/>
+              </a:rPr>
+              <a:t>F2</a:t>
+            </a:r>
+          </a:p>
+          <a:p>
+            <a:pPr marL="0" marR="0" lvl="0" indent="0" rtl="0">
+              <a:spcBef>
+                <a:spcPts val="0"/>
+              </a:spcBef>
+              <a:spcAft>
+                <a:spcPts val="0"/>
+              </a:spcAft>
+              <a:buNone/>
+            </a:pPr>
+            <a:r>
+              <a:rPr lang="en-US" sz="565" dirty="0">
+                <a:solidFill>
+                  <a:schemeClr val="dk1"/>
+                </a:solidFill>
+                <a:latin typeface="HeadLineA"/>
+                <a:ea typeface="HeadLineA"/>
+                <a:sym typeface="HeadLineA"/>
+              </a:rPr>
+              <a:t>GND</a:t>
+            </a:r>
+          </a:p>
+          <a:p>
+            <a:pPr marL="0" marR="0" lvl="0" indent="0" rtl="0">
+              <a:spcBef>
+                <a:spcPts val="0"/>
+              </a:spcBef>
+              <a:spcAft>
+                <a:spcPts val="0"/>
+              </a:spcAft>
+              <a:buNone/>
+            </a:pPr>
+            <a:r>
+              <a:rPr lang="en-US" sz="565" dirty="0">
+                <a:solidFill>
+                  <a:schemeClr val="dk1"/>
+                </a:solidFill>
+                <a:latin typeface="HeadLineA"/>
+                <a:ea typeface="HeadLineA"/>
+                <a:sym typeface="HeadLineA"/>
+              </a:rPr>
+              <a:t>3V3</a:t>
+            </a:r>
+            <a:endParaRPr dirty="0"/>
+          </a:p>
+        </p:txBody>
+      </p:sp>
+      <p:grpSp>
+        <p:nvGrpSpPr>
+          <p:cNvPr id="13" name="Google Shape;3963;p51">
+            <a:extLst>
+              <a:ext uri="{FF2B5EF4-FFF2-40B4-BE49-F238E27FC236}">
+                <a16:creationId xmlns:a16="http://schemas.microsoft.com/office/drawing/2014/main" id="{62CE9EED-BB1C-EC42-1D6F-0992E6717F6C}"/>
+              </a:ext>
+            </a:extLst>
+          </p:cNvPr>
+          <p:cNvGrpSpPr/>
+          <p:nvPr/>
+        </p:nvGrpSpPr>
+        <p:grpSpPr>
+          <a:xfrm>
+            <a:off x="4201578" y="1032761"/>
+            <a:ext cx="344916" cy="1396496"/>
+            <a:chOff x="5407550" y="3284884"/>
+            <a:chExt cx="344916" cy="1396496"/>
+          </a:xfrm>
+        </p:grpSpPr>
+        <p:sp>
+          <p:nvSpPr>
+            <p:cNvPr id="14" name="Google Shape;3964;p51">
+              <a:extLst>
+                <a:ext uri="{FF2B5EF4-FFF2-40B4-BE49-F238E27FC236}">
+                  <a16:creationId xmlns:a16="http://schemas.microsoft.com/office/drawing/2014/main" id="{207A2F5F-BF7D-262F-0B46-40F05BE44EAB}"/>
+                </a:ext>
+              </a:extLst>
+            </p:cNvPr>
+            <p:cNvSpPr txBox="1"/>
+            <p:nvPr/>
+          </p:nvSpPr>
+          <p:spPr>
+            <a:xfrm>
+              <a:off x="5510092" y="3284884"/>
+              <a:ext cx="242374" cy="1396496"/>
+            </a:xfrm>
+            <a:prstGeom prst="rect">
+              <a:avLst/>
+            </a:prstGeom>
+            <a:noFill/>
+            <a:ln>
+              <a:noFill/>
+            </a:ln>
+          </p:spPr>
+          <p:txBody>
+            <a:bodyPr spcFirstLastPara="1" wrap="square" lIns="91425" tIns="45700" rIns="91425" bIns="45700" anchor="t" anchorCtr="0">
+              <a:spAutoFit/>
+            </a:bodyPr>
+            <a:lstStyle/>
+            <a:p>
+              <a:pPr marL="0" marR="0" lvl="0" indent="0" algn="r" rtl="0">
+                <a:spcBef>
+                  <a:spcPts val="0"/>
+                </a:spcBef>
+                <a:spcAft>
+                  <a:spcPts val="0"/>
+                </a:spcAft>
+                <a:buNone/>
+              </a:pPr>
+              <a:r>
+                <a:rPr lang="en-US" sz="565" dirty="0">
+                  <a:solidFill>
+                    <a:schemeClr val="dk1"/>
+                  </a:solidFill>
+                  <a:latin typeface="HeadLineA"/>
+                  <a:ea typeface="HeadLineA"/>
+                  <a:sym typeface="HeadLineA"/>
+                </a:rPr>
+                <a:t>29</a:t>
+              </a:r>
+            </a:p>
+            <a:p>
+              <a:pPr marL="0" marR="0" lvl="0" indent="0" algn="r" rtl="0">
+                <a:spcBef>
+                  <a:spcPts val="0"/>
+                </a:spcBef>
+                <a:spcAft>
+                  <a:spcPts val="0"/>
+                </a:spcAft>
+                <a:buNone/>
+              </a:pPr>
+              <a:r>
+                <a:rPr lang="en-US" sz="565" dirty="0">
+                  <a:solidFill>
+                    <a:schemeClr val="dk1"/>
+                  </a:solidFill>
+                  <a:latin typeface="HeadLineA"/>
+                  <a:ea typeface="HeadLineA"/>
+                  <a:sym typeface="HeadLineA"/>
+                </a:rPr>
+                <a:t>27</a:t>
+              </a:r>
+            </a:p>
+            <a:p>
+              <a:pPr marL="0" marR="0" lvl="0" indent="0" algn="r" rtl="0">
+                <a:spcBef>
+                  <a:spcPts val="0"/>
+                </a:spcBef>
+                <a:spcAft>
+                  <a:spcPts val="0"/>
+                </a:spcAft>
+                <a:buNone/>
+              </a:pPr>
+              <a:r>
+                <a:rPr lang="en-US" sz="565" dirty="0">
+                  <a:solidFill>
+                    <a:schemeClr val="dk1"/>
+                  </a:solidFill>
+                  <a:latin typeface="HeadLineA"/>
+                  <a:ea typeface="HeadLineA"/>
+                  <a:sym typeface="HeadLineA"/>
+                </a:rPr>
+                <a:t>25</a:t>
+              </a:r>
+            </a:p>
+            <a:p>
+              <a:pPr marL="0" marR="0" lvl="0" indent="0" algn="r" rtl="0">
+                <a:spcBef>
+                  <a:spcPts val="0"/>
+                </a:spcBef>
+                <a:spcAft>
+                  <a:spcPts val="0"/>
+                </a:spcAft>
+                <a:buNone/>
+              </a:pPr>
+              <a:r>
+                <a:rPr lang="en-US" sz="565" dirty="0">
+                  <a:solidFill>
+                    <a:schemeClr val="dk1"/>
+                  </a:solidFill>
+                  <a:latin typeface="HeadLineA"/>
+                  <a:ea typeface="HeadLineA"/>
+                  <a:sym typeface="HeadLineA"/>
+                </a:rPr>
+                <a:t>23</a:t>
+              </a:r>
+            </a:p>
+            <a:p>
+              <a:pPr marL="0" marR="0" lvl="0" indent="0" algn="r" rtl="0">
+                <a:spcBef>
+                  <a:spcPts val="0"/>
+                </a:spcBef>
+                <a:spcAft>
+                  <a:spcPts val="0"/>
+                </a:spcAft>
+                <a:buNone/>
+              </a:pPr>
+              <a:r>
+                <a:rPr lang="en-US" sz="565" dirty="0">
+                  <a:solidFill>
+                    <a:schemeClr val="dk1"/>
+                  </a:solidFill>
+                  <a:latin typeface="HeadLineA"/>
+                  <a:ea typeface="HeadLineA"/>
+                  <a:sym typeface="HeadLineA"/>
+                </a:rPr>
+                <a:t>21</a:t>
+              </a:r>
+            </a:p>
+            <a:p>
+              <a:pPr marL="0" marR="0" lvl="0" indent="0" algn="r" rtl="0">
+                <a:spcBef>
+                  <a:spcPts val="0"/>
+                </a:spcBef>
+                <a:spcAft>
+                  <a:spcPts val="0"/>
+                </a:spcAft>
+                <a:buNone/>
+              </a:pPr>
+              <a:r>
+                <a:rPr lang="en-US" sz="565" dirty="0">
+                  <a:solidFill>
+                    <a:schemeClr val="dk1"/>
+                  </a:solidFill>
+                  <a:latin typeface="HeadLineA"/>
+                  <a:ea typeface="HeadLineA"/>
+                  <a:sym typeface="HeadLineA"/>
+                </a:rPr>
+                <a:t>19</a:t>
+              </a:r>
+            </a:p>
+            <a:p>
+              <a:pPr marL="0" marR="0" lvl="0" indent="0" algn="r" rtl="0">
+                <a:spcBef>
+                  <a:spcPts val="0"/>
+                </a:spcBef>
+                <a:spcAft>
+                  <a:spcPts val="0"/>
+                </a:spcAft>
+                <a:buNone/>
+              </a:pPr>
+              <a:r>
+                <a:rPr lang="en-US" sz="565" dirty="0">
+                  <a:solidFill>
+                    <a:schemeClr val="dk1"/>
+                  </a:solidFill>
+                  <a:latin typeface="HeadLineA"/>
+                  <a:ea typeface="HeadLineA"/>
+                  <a:sym typeface="HeadLineA"/>
+                </a:rPr>
+                <a:t>17</a:t>
+              </a:r>
+            </a:p>
+            <a:p>
+              <a:pPr marL="0" marR="0" lvl="0" indent="0" algn="r" rtl="0">
+                <a:spcBef>
+                  <a:spcPts val="0"/>
+                </a:spcBef>
+                <a:spcAft>
+                  <a:spcPts val="0"/>
+                </a:spcAft>
+                <a:buNone/>
+              </a:pPr>
+              <a:r>
+                <a:rPr lang="en-US" sz="565" dirty="0">
+                  <a:solidFill>
+                    <a:schemeClr val="dk1"/>
+                  </a:solidFill>
+                  <a:latin typeface="HeadLineA"/>
+                  <a:ea typeface="HeadLineA"/>
+                  <a:sym typeface="HeadLineA"/>
+                </a:rPr>
+                <a:t>15</a:t>
+              </a:r>
+            </a:p>
+            <a:p>
+              <a:pPr marL="0" marR="0" lvl="0" indent="0" algn="r" rtl="0">
+                <a:spcBef>
+                  <a:spcPts val="0"/>
+                </a:spcBef>
+                <a:spcAft>
+                  <a:spcPts val="0"/>
+                </a:spcAft>
+                <a:buNone/>
+              </a:pPr>
+              <a:r>
+                <a:rPr lang="en-US" sz="565" dirty="0">
+                  <a:solidFill>
+                    <a:schemeClr val="dk1"/>
+                  </a:solidFill>
+                  <a:latin typeface="HeadLineA"/>
+                  <a:ea typeface="HeadLineA"/>
+                  <a:sym typeface="HeadLineA"/>
+                </a:rPr>
+                <a:t>13</a:t>
+              </a:r>
+            </a:p>
+            <a:p>
+              <a:pPr marL="0" marR="0" lvl="0" indent="0" algn="r" rtl="0">
+                <a:spcBef>
+                  <a:spcPts val="0"/>
+                </a:spcBef>
+                <a:spcAft>
+                  <a:spcPts val="0"/>
+                </a:spcAft>
+                <a:buNone/>
+              </a:pPr>
+              <a:r>
+                <a:rPr lang="en-US" sz="565" dirty="0">
+                  <a:solidFill>
+                    <a:schemeClr val="dk1"/>
+                  </a:solidFill>
+                  <a:latin typeface="HeadLineA"/>
+                  <a:ea typeface="HeadLineA"/>
+                  <a:sym typeface="HeadLineA"/>
+                </a:rPr>
+                <a:t>11</a:t>
+              </a:r>
+            </a:p>
+            <a:p>
+              <a:pPr marL="0" marR="0" lvl="0" indent="0" algn="r" rtl="0">
+                <a:spcBef>
+                  <a:spcPts val="0"/>
+                </a:spcBef>
+                <a:spcAft>
+                  <a:spcPts val="0"/>
+                </a:spcAft>
+                <a:buNone/>
+              </a:pPr>
+              <a:r>
+                <a:rPr lang="en-US" sz="565" dirty="0">
+                  <a:solidFill>
+                    <a:schemeClr val="dk1"/>
+                  </a:solidFill>
+                  <a:latin typeface="HeadLineA"/>
+                  <a:ea typeface="HeadLineA"/>
+                  <a:sym typeface="HeadLineA"/>
+                </a:rPr>
+                <a:t>9</a:t>
+              </a:r>
+            </a:p>
+            <a:p>
+              <a:pPr marL="0" marR="0" lvl="0" indent="0" algn="r" rtl="0">
+                <a:spcBef>
+                  <a:spcPts val="0"/>
+                </a:spcBef>
+                <a:spcAft>
+                  <a:spcPts val="0"/>
+                </a:spcAft>
+                <a:buNone/>
+              </a:pPr>
+              <a:r>
+                <a:rPr lang="en-US" sz="565" dirty="0">
+                  <a:solidFill>
+                    <a:schemeClr val="dk1"/>
+                  </a:solidFill>
+                  <a:latin typeface="HeadLineA"/>
+                  <a:ea typeface="HeadLineA"/>
+                  <a:sym typeface="HeadLineA"/>
+                </a:rPr>
+                <a:t>7</a:t>
+              </a:r>
+            </a:p>
+            <a:p>
+              <a:pPr marL="0" marR="0" lvl="0" indent="0" algn="r" rtl="0">
+                <a:spcBef>
+                  <a:spcPts val="0"/>
+                </a:spcBef>
+                <a:spcAft>
+                  <a:spcPts val="0"/>
+                </a:spcAft>
+                <a:buNone/>
+              </a:pPr>
+              <a:r>
+                <a:rPr lang="en-US" sz="565" dirty="0">
+                  <a:solidFill>
+                    <a:schemeClr val="dk1"/>
+                  </a:solidFill>
+                  <a:latin typeface="HeadLineA"/>
+                  <a:ea typeface="HeadLineA"/>
+                  <a:sym typeface="HeadLineA"/>
+                </a:rPr>
+                <a:t>5</a:t>
+              </a:r>
+            </a:p>
+            <a:p>
+              <a:pPr marL="0" marR="0" lvl="0" indent="0" algn="r" rtl="0">
+                <a:spcBef>
+                  <a:spcPts val="0"/>
+                </a:spcBef>
+                <a:spcAft>
+                  <a:spcPts val="0"/>
+                </a:spcAft>
+                <a:buNone/>
+              </a:pPr>
+              <a:r>
+                <a:rPr lang="en-US" sz="565" dirty="0">
+                  <a:solidFill>
+                    <a:schemeClr val="dk1"/>
+                  </a:solidFill>
+                  <a:latin typeface="HeadLineA"/>
+                  <a:ea typeface="HeadLineA"/>
+                  <a:sym typeface="HeadLineA"/>
+                </a:rPr>
+                <a:t>3</a:t>
+              </a:r>
+            </a:p>
+            <a:p>
+              <a:pPr marL="0" marR="0" lvl="0" indent="0" algn="r" rtl="0">
+                <a:spcBef>
+                  <a:spcPts val="0"/>
+                </a:spcBef>
+                <a:spcAft>
+                  <a:spcPts val="0"/>
+                </a:spcAft>
+                <a:buNone/>
+              </a:pPr>
+              <a:r>
+                <a:rPr lang="en-US" sz="565" dirty="0">
+                  <a:solidFill>
+                    <a:schemeClr val="dk1"/>
+                  </a:solidFill>
+                  <a:latin typeface="HeadLineA"/>
+                  <a:ea typeface="HeadLineA"/>
+                  <a:sym typeface="HeadLineA"/>
+                </a:rPr>
+                <a:t>1</a:t>
+              </a:r>
+            </a:p>
+          </p:txBody>
+        </p:sp>
+        <p:sp>
+          <p:nvSpPr>
+            <p:cNvPr id="15" name="Google Shape;3965;p51">
+              <a:extLst>
+                <a:ext uri="{FF2B5EF4-FFF2-40B4-BE49-F238E27FC236}">
+                  <a16:creationId xmlns:a16="http://schemas.microsoft.com/office/drawing/2014/main" id="{6D52C6C0-32BC-B3BD-8446-3A2E1D40DBAB}"/>
+                </a:ext>
+              </a:extLst>
+            </p:cNvPr>
+            <p:cNvSpPr txBox="1"/>
+            <p:nvPr/>
+          </p:nvSpPr>
+          <p:spPr>
+            <a:xfrm>
+              <a:off x="5407550" y="3284884"/>
+              <a:ext cx="242374" cy="1396496"/>
+            </a:xfrm>
+            <a:prstGeom prst="rect">
+              <a:avLst/>
+            </a:prstGeom>
+            <a:noFill/>
+            <a:ln>
+              <a:noFill/>
+            </a:ln>
+          </p:spPr>
+          <p:txBody>
+            <a:bodyPr spcFirstLastPara="1" wrap="square" lIns="91425" tIns="45700" rIns="91425" bIns="45700" anchor="t" anchorCtr="0">
+              <a:spAutoFit/>
+            </a:bodyPr>
+            <a:lstStyle/>
+            <a:p>
+              <a:pPr marL="0" marR="0" lvl="0" indent="0" rtl="0">
+                <a:spcBef>
+                  <a:spcPts val="0"/>
+                </a:spcBef>
+                <a:spcAft>
+                  <a:spcPts val="0"/>
+                </a:spcAft>
+                <a:buNone/>
+              </a:pPr>
+              <a:r>
+                <a:rPr lang="en-US" sz="565" dirty="0">
+                  <a:solidFill>
+                    <a:schemeClr val="dk1"/>
+                  </a:solidFill>
+                  <a:latin typeface="HeadLineA"/>
+                  <a:ea typeface="HeadLineA"/>
+                  <a:sym typeface="HeadLineA"/>
+                </a:rPr>
+                <a:t>30</a:t>
+              </a:r>
+            </a:p>
+            <a:p>
+              <a:pPr marL="0" marR="0" lvl="0" indent="0" rtl="0">
+                <a:spcBef>
+                  <a:spcPts val="0"/>
+                </a:spcBef>
+                <a:spcAft>
+                  <a:spcPts val="0"/>
+                </a:spcAft>
+                <a:buNone/>
+              </a:pPr>
+              <a:r>
+                <a:rPr lang="en-US" sz="565" dirty="0">
+                  <a:solidFill>
+                    <a:schemeClr val="dk1"/>
+                  </a:solidFill>
+                  <a:latin typeface="HeadLineA"/>
+                  <a:ea typeface="HeadLineA"/>
+                  <a:sym typeface="HeadLineA"/>
+                </a:rPr>
+                <a:t>28</a:t>
+              </a:r>
+            </a:p>
+            <a:p>
+              <a:pPr marL="0" marR="0" lvl="0" indent="0" rtl="0">
+                <a:spcBef>
+                  <a:spcPts val="0"/>
+                </a:spcBef>
+                <a:spcAft>
+                  <a:spcPts val="0"/>
+                </a:spcAft>
+                <a:buNone/>
+              </a:pPr>
+              <a:r>
+                <a:rPr lang="en-US" sz="565" dirty="0">
+                  <a:solidFill>
+                    <a:schemeClr val="dk1"/>
+                  </a:solidFill>
+                  <a:latin typeface="HeadLineA"/>
+                  <a:ea typeface="HeadLineA"/>
+                  <a:sym typeface="HeadLineA"/>
+                </a:rPr>
+                <a:t>26</a:t>
+              </a:r>
+            </a:p>
+            <a:p>
+              <a:pPr marL="0" marR="0" lvl="0" indent="0" rtl="0">
+                <a:spcBef>
+                  <a:spcPts val="0"/>
+                </a:spcBef>
+                <a:spcAft>
+                  <a:spcPts val="0"/>
+                </a:spcAft>
+                <a:buNone/>
+              </a:pPr>
+              <a:r>
+                <a:rPr lang="en-US" sz="565" dirty="0">
+                  <a:solidFill>
+                    <a:schemeClr val="dk1"/>
+                  </a:solidFill>
+                  <a:latin typeface="HeadLineA"/>
+                  <a:ea typeface="HeadLineA"/>
+                  <a:sym typeface="HeadLineA"/>
+                </a:rPr>
+                <a:t>24</a:t>
+              </a:r>
+            </a:p>
+            <a:p>
+              <a:pPr marL="0" marR="0" lvl="0" indent="0" rtl="0">
+                <a:spcBef>
+                  <a:spcPts val="0"/>
+                </a:spcBef>
+                <a:spcAft>
+                  <a:spcPts val="0"/>
+                </a:spcAft>
+                <a:buNone/>
+              </a:pPr>
+              <a:r>
+                <a:rPr lang="en-US" sz="565" dirty="0">
+                  <a:solidFill>
+                    <a:schemeClr val="dk1"/>
+                  </a:solidFill>
+                  <a:latin typeface="HeadLineA"/>
+                  <a:ea typeface="HeadLineA"/>
+                  <a:sym typeface="HeadLineA"/>
+                </a:rPr>
+                <a:t>22</a:t>
+              </a:r>
+            </a:p>
+            <a:p>
+              <a:pPr marL="0" marR="0" lvl="0" indent="0" rtl="0">
+                <a:spcBef>
+                  <a:spcPts val="0"/>
+                </a:spcBef>
+                <a:spcAft>
+                  <a:spcPts val="0"/>
+                </a:spcAft>
+                <a:buNone/>
+              </a:pPr>
+              <a:r>
+                <a:rPr lang="en-US" sz="565" dirty="0">
+                  <a:solidFill>
+                    <a:schemeClr val="dk1"/>
+                  </a:solidFill>
+                  <a:latin typeface="HeadLineA"/>
+                  <a:ea typeface="HeadLineA"/>
+                  <a:sym typeface="HeadLineA"/>
+                </a:rPr>
+                <a:t>20</a:t>
+              </a:r>
+            </a:p>
+            <a:p>
+              <a:pPr marL="0" marR="0" lvl="0" indent="0" rtl="0">
+                <a:spcBef>
+                  <a:spcPts val="0"/>
+                </a:spcBef>
+                <a:spcAft>
+                  <a:spcPts val="0"/>
+                </a:spcAft>
+                <a:buNone/>
+              </a:pPr>
+              <a:r>
+                <a:rPr lang="en-US" sz="565" dirty="0">
+                  <a:solidFill>
+                    <a:schemeClr val="dk1"/>
+                  </a:solidFill>
+                  <a:latin typeface="HeadLineA"/>
+                  <a:ea typeface="HeadLineA"/>
+                  <a:sym typeface="HeadLineA"/>
+                </a:rPr>
+                <a:t>18</a:t>
+              </a:r>
+            </a:p>
+            <a:p>
+              <a:pPr marL="0" marR="0" lvl="0" indent="0" rtl="0">
+                <a:spcBef>
+                  <a:spcPts val="0"/>
+                </a:spcBef>
+                <a:spcAft>
+                  <a:spcPts val="0"/>
+                </a:spcAft>
+                <a:buNone/>
+              </a:pPr>
+              <a:r>
+                <a:rPr lang="en-US" sz="565" dirty="0">
+                  <a:solidFill>
+                    <a:schemeClr val="dk1"/>
+                  </a:solidFill>
+                  <a:latin typeface="HeadLineA"/>
+                  <a:ea typeface="HeadLineA"/>
+                  <a:sym typeface="HeadLineA"/>
+                </a:rPr>
+                <a:t>16</a:t>
+              </a:r>
+            </a:p>
+            <a:p>
+              <a:pPr marL="0" marR="0" lvl="0" indent="0" rtl="0">
+                <a:spcBef>
+                  <a:spcPts val="0"/>
+                </a:spcBef>
+                <a:spcAft>
+                  <a:spcPts val="0"/>
+                </a:spcAft>
+                <a:buNone/>
+              </a:pPr>
+              <a:r>
+                <a:rPr lang="en-US" sz="565" dirty="0">
+                  <a:solidFill>
+                    <a:schemeClr val="dk1"/>
+                  </a:solidFill>
+                  <a:latin typeface="HeadLineA"/>
+                  <a:ea typeface="HeadLineA"/>
+                  <a:sym typeface="HeadLineA"/>
+                </a:rPr>
+                <a:t>14</a:t>
+              </a:r>
+            </a:p>
+            <a:p>
+              <a:pPr marL="0" marR="0" lvl="0" indent="0" rtl="0">
+                <a:spcBef>
+                  <a:spcPts val="0"/>
+                </a:spcBef>
+                <a:spcAft>
+                  <a:spcPts val="0"/>
+                </a:spcAft>
+                <a:buNone/>
+              </a:pPr>
+              <a:r>
+                <a:rPr lang="en-US" sz="565" dirty="0">
+                  <a:solidFill>
+                    <a:schemeClr val="dk1"/>
+                  </a:solidFill>
+                  <a:latin typeface="HeadLineA"/>
+                  <a:ea typeface="HeadLineA"/>
+                  <a:sym typeface="HeadLineA"/>
+                </a:rPr>
+                <a:t>12</a:t>
+              </a:r>
+            </a:p>
+            <a:p>
+              <a:pPr marL="0" marR="0" lvl="0" indent="0" rtl="0">
+                <a:spcBef>
+                  <a:spcPts val="0"/>
+                </a:spcBef>
+                <a:spcAft>
+                  <a:spcPts val="0"/>
+                </a:spcAft>
+                <a:buNone/>
+              </a:pPr>
+              <a:r>
+                <a:rPr lang="en-US" sz="565" dirty="0">
+                  <a:solidFill>
+                    <a:schemeClr val="dk1"/>
+                  </a:solidFill>
+                  <a:latin typeface="HeadLineA"/>
+                  <a:ea typeface="HeadLineA"/>
+                  <a:sym typeface="HeadLineA"/>
+                </a:rPr>
+                <a:t>10</a:t>
+              </a:r>
+            </a:p>
+            <a:p>
+              <a:pPr marL="0" marR="0" lvl="0" indent="0" rtl="0">
+                <a:spcBef>
+                  <a:spcPts val="0"/>
+                </a:spcBef>
+                <a:spcAft>
+                  <a:spcPts val="0"/>
+                </a:spcAft>
+                <a:buNone/>
+              </a:pPr>
+              <a:r>
+                <a:rPr lang="en-US" sz="565" dirty="0">
+                  <a:solidFill>
+                    <a:schemeClr val="dk1"/>
+                  </a:solidFill>
+                  <a:latin typeface="HeadLineA"/>
+                  <a:ea typeface="HeadLineA"/>
+                  <a:sym typeface="HeadLineA"/>
+                </a:rPr>
+                <a:t>8</a:t>
+              </a:r>
+            </a:p>
+            <a:p>
+              <a:pPr marL="0" marR="0" lvl="0" indent="0" rtl="0">
+                <a:spcBef>
+                  <a:spcPts val="0"/>
+                </a:spcBef>
+                <a:spcAft>
+                  <a:spcPts val="0"/>
+                </a:spcAft>
+                <a:buNone/>
+              </a:pPr>
+              <a:r>
+                <a:rPr lang="en-US" sz="565" dirty="0">
+                  <a:solidFill>
+                    <a:schemeClr val="dk1"/>
+                  </a:solidFill>
+                  <a:latin typeface="HeadLineA"/>
+                  <a:ea typeface="HeadLineA"/>
+                  <a:sym typeface="HeadLineA"/>
+                </a:rPr>
+                <a:t>6</a:t>
+              </a:r>
+            </a:p>
+            <a:p>
+              <a:pPr marL="0" marR="0" lvl="0" indent="0" rtl="0">
+                <a:spcBef>
+                  <a:spcPts val="0"/>
+                </a:spcBef>
+                <a:spcAft>
+                  <a:spcPts val="0"/>
+                </a:spcAft>
+                <a:buNone/>
+              </a:pPr>
+              <a:r>
+                <a:rPr lang="en-US" sz="565" dirty="0">
+                  <a:solidFill>
+                    <a:schemeClr val="dk1"/>
+                  </a:solidFill>
+                  <a:latin typeface="HeadLineA"/>
+                  <a:ea typeface="HeadLineA"/>
+                  <a:sym typeface="HeadLineA"/>
+                </a:rPr>
+                <a:t>4</a:t>
+              </a:r>
+            </a:p>
+            <a:p>
+              <a:pPr marL="0" marR="0" lvl="0" indent="0" rtl="0">
+                <a:spcBef>
+                  <a:spcPts val="0"/>
+                </a:spcBef>
+                <a:spcAft>
+                  <a:spcPts val="0"/>
+                </a:spcAft>
+                <a:buNone/>
+              </a:pPr>
+              <a:r>
+                <a:rPr lang="en-US" sz="565" dirty="0">
+                  <a:solidFill>
+                    <a:schemeClr val="dk1"/>
+                  </a:solidFill>
+                  <a:latin typeface="HeadLineA"/>
+                  <a:ea typeface="HeadLineA"/>
+                  <a:sym typeface="HeadLineA"/>
+                </a:rPr>
+                <a:t>2</a:t>
+              </a:r>
+              <a:endParaRPr lang="en-US" sz="565" dirty="0">
+                <a:solidFill>
+                  <a:schemeClr val="dk1"/>
+                </a:solidFill>
+                <a:latin typeface="HeadLineA"/>
+                <a:ea typeface="HeadLineA"/>
+                <a:cs typeface="HeadLineA"/>
+                <a:sym typeface="HeadLineA"/>
+              </a:endParaRPr>
+            </a:p>
+          </p:txBody>
+        </p:sp>
+        <p:sp>
+          <p:nvSpPr>
+            <p:cNvPr id="16" name="Google Shape;3966;p51">
+              <a:extLst>
+                <a:ext uri="{FF2B5EF4-FFF2-40B4-BE49-F238E27FC236}">
+                  <a16:creationId xmlns:a16="http://schemas.microsoft.com/office/drawing/2014/main" id="{51ADB7A7-CD45-16AE-9D9C-69DD5A447B18}"/>
+                </a:ext>
+              </a:extLst>
+            </p:cNvPr>
+            <p:cNvSpPr/>
+            <p:nvPr/>
+          </p:nvSpPr>
+          <p:spPr>
+            <a:xfrm>
+              <a:off x="5466802" y="3319921"/>
+              <a:ext cx="211420" cy="1314450"/>
+            </a:xfrm>
+            <a:prstGeom prst="rect">
+              <a:avLst/>
+            </a:prstGeom>
+            <a:noFill/>
+            <a:ln w="9525" cap="flat" cmpd="sng">
+              <a:solidFill>
+                <a:schemeClr val="dk1"/>
+              </a:solidFill>
+              <a:prstDash val="solid"/>
+              <a:miter lim="800000"/>
+              <a:headEnd type="none" w="sm" len="sm"/>
+              <a:tailEnd type="none" w="sm" len="sm"/>
+            </a:ln>
+          </p:spPr>
+          <p:txBody>
+            <a:bodyPr spcFirstLastPara="1" wrap="square" lIns="91425" tIns="45700" rIns="91425" bIns="45700" anchor="ctr" anchorCtr="0">
+              <a:noAutofit/>
+            </a:bodyPr>
+            <a:lstStyle/>
+            <a:p>
+              <a:pPr marL="0" marR="0" lvl="0" indent="0" algn="ctr" rtl="0">
+                <a:spcBef>
+                  <a:spcPts val="0"/>
+                </a:spcBef>
+                <a:spcAft>
+                  <a:spcPts val="0"/>
+                </a:spcAft>
+                <a:buNone/>
+              </a:pPr>
+              <a:endParaRPr sz="565">
+                <a:solidFill>
+                  <a:schemeClr val="lt1"/>
+                </a:solidFill>
+                <a:latin typeface="HeadLineA"/>
+                <a:ea typeface="HeadLineA"/>
+                <a:cs typeface="HeadLineA"/>
+                <a:sym typeface="HeadLineA"/>
+              </a:endParaRPr>
+            </a:p>
+          </p:txBody>
+        </p:sp>
+      </p:grpSp>
+      <p:pic>
+        <p:nvPicPr>
+          <p:cNvPr id="17" name="図 16">
+            <a:extLst>
+              <a:ext uri="{FF2B5EF4-FFF2-40B4-BE49-F238E27FC236}">
+                <a16:creationId xmlns:a16="http://schemas.microsoft.com/office/drawing/2014/main" id="{09F3C1E1-5392-C4D3-60ED-296C5D5FE2CA}"/>
+              </a:ext>
+            </a:extLst>
+          </p:cNvPr>
+          <p:cNvPicPr>
+            <a:picLocks noChangeAspect="1"/>
+          </p:cNvPicPr>
+          <p:nvPr/>
+        </p:nvPicPr>
+        <p:blipFill>
+          <a:blip r:embed="rId2"/>
+          <a:stretch>
+            <a:fillRect/>
+          </a:stretch>
+        </p:blipFill>
+        <p:spPr>
+          <a:xfrm rot="10800000">
+            <a:off x="5120341" y="2277401"/>
+            <a:ext cx="1348536" cy="1250741"/>
+          </a:xfrm>
+          <a:prstGeom prst="rect">
+            <a:avLst/>
+          </a:prstGeom>
+        </p:spPr>
+      </p:pic>
+      <p:pic>
+        <p:nvPicPr>
+          <p:cNvPr id="18" name="図 17">
+            <a:extLst>
+              <a:ext uri="{FF2B5EF4-FFF2-40B4-BE49-F238E27FC236}">
+                <a16:creationId xmlns:a16="http://schemas.microsoft.com/office/drawing/2014/main" id="{5B60FBD0-0F4A-A8E5-32D1-B58F289601CE}"/>
+              </a:ext>
+            </a:extLst>
+          </p:cNvPr>
+          <p:cNvPicPr>
+            <a:picLocks noChangeAspect="1"/>
+          </p:cNvPicPr>
+          <p:nvPr/>
+        </p:nvPicPr>
+        <p:blipFill>
+          <a:blip r:embed="rId3"/>
+          <a:stretch>
+            <a:fillRect/>
+          </a:stretch>
+        </p:blipFill>
+        <p:spPr>
+          <a:xfrm rot="16200000">
+            <a:off x="5269492" y="1106405"/>
+            <a:ext cx="1050233" cy="1229305"/>
+          </a:xfrm>
+          <a:prstGeom prst="rect">
+            <a:avLst/>
+          </a:prstGeom>
+        </p:spPr>
+      </p:pic>
     </p:spTree>
     <p:extLst>
       <p:ext uri="{BB962C8B-B14F-4D97-AF65-F5344CB8AC3E}">
